--- a/docs/Module5_Stakeholder_Presentation.pptx
+++ b/docs/Module5_Stakeholder_Presentation.pptx
@@ -19,9 +19,10 @@
     <p:sldId id="267" r:id="rId13"/>
     <p:sldId id="268" r:id="rId14"/>
     <p:sldId id="269" r:id="rId15"/>
+    <p:sldId id="270" r:id="rId16"/>
   </p:sldIdLst>
   <p:notesMasterIdLst>
-    <p:notesMasterId r:id="rId16"/>
+    <p:notesMasterId r:id="rId17"/>
   </p:notesMasterIdLst>
   <p:sldSz cx="12192000" cy="6858000"/>
   <p:notesSz cx="6858000" cy="12192000"/>
@@ -2043,6 +2044,94 @@
             <a:fld id="{F7021451-1387-4CA6-816F-3879F97B5CBC}" type="slidenum">
               <a:rPr lang="en-US"/>
               <a:t>14</a:t>
+            </a:fld>
+            <a:endParaRPr lang="en-US"/>
+          </a:p>
+        </p:txBody>
+      </p:sp>
+    </p:spTree>
+    <p:extLst>
+      <p:ext uri="{BB962C8B-B14F-4D97-AF65-F5344CB8AC3E}">
+        <p14:creationId xmlns:p14="http://schemas.microsoft.com/office/powerpoint/2010/main" val="1024086991"/>
+      </p:ext>
+    </p:extLst>
+  </p:cSld>
+  <p:clrMapOvr>
+    <a:masterClrMapping/>
+  </p:clrMapOvr>
+</p:notes>
+</file>
+
+<file path=ppt/notesSlides/notesSlide15.xml><?xml version="1.0" encoding="utf-8"?>
+<p:notes xmlns:a="http://schemas.openxmlformats.org/drawingml/2006/main" xmlns:r="http://schemas.openxmlformats.org/officeDocument/2006/relationships" xmlns:p="http://schemas.openxmlformats.org/presentationml/2006/main">
+  <p:cSld>
+    <p:spTree>
+      <p:nvGrpSpPr>
+        <p:cNvPr id="1" name=""/>
+        <p:cNvGrpSpPr/>
+        <p:nvPr/>
+      </p:nvGrpSpPr>
+      <p:grpSpPr>
+        <a:xfrm>
+          <a:off x="0" y="0"/>
+          <a:ext cx="0" cy="0"/>
+          <a:chOff x="0" y="0"/>
+          <a:chExt cx="0" cy="0"/>
+        </a:xfrm>
+      </p:grpSpPr>
+      <p:sp>
+        <p:nvSpPr>
+          <p:cNvPr id="2" name="Slide Image Placeholder 1"/>
+          <p:cNvSpPr>
+            <a:spLocks noGrp="1" noRot="1" noChangeAspect="1"/>
+          </p:cNvSpPr>
+          <p:nvPr>
+            <p:ph type="sldImg"/>
+          </p:nvPr>
+        </p:nvSpPr>
+        <p:spPr/>
+      </p:sp>
+      <p:sp>
+        <p:nvSpPr>
+          <p:cNvPr id="3" name="Notes Placeholder 2"/>
+          <p:cNvSpPr>
+            <a:spLocks noGrp="1"/>
+          </p:cNvSpPr>
+          <p:nvPr>
+            <p:ph type="body" idx="1"/>
+          </p:nvPr>
+        </p:nvSpPr>
+        <p:spPr/>
+        <p:txBody>
+          <a:bodyPr/>
+          <a:lstStyle/>
+          <a:p>
+            <a:r>
+              <a:rPr lang="en-US" dirty="0"/>
+              <a:t/>
+            </a:r>
+            <a:endParaRPr lang="en-US" dirty="0"/>
+          </a:p>
+        </p:txBody>
+      </p:sp>
+      <p:sp>
+        <p:nvSpPr>
+          <p:cNvPr id="4" name="Slide Number Placeholder 3"/>
+          <p:cNvSpPr>
+            <a:spLocks noGrp="1"/>
+          </p:cNvSpPr>
+          <p:nvPr>
+            <p:ph type="sldNum" sz="quarter" idx="10"/>
+          </p:nvPr>
+        </p:nvSpPr>
+        <p:spPr/>
+        <p:txBody>
+          <a:bodyPr/>
+          <a:lstStyle/>
+          <a:p>
+            <a:fld id="{F7021451-1387-4CA6-816F-3879F97B5CBC}" type="slidenum">
+              <a:rPr lang="en-US"/>
+              <a:t>15</a:t>
             </a:fld>
             <a:endParaRPr lang="en-US"/>
           </a:p>
@@ -5352,6 +5441,272 @@
 </p:sld>
 </file>
 
+<file path=ppt/slides/slide15.xml><?xml version="1.0" encoding="utf-8"?>
+<p:sld xmlns:a="http://schemas.openxmlformats.org/drawingml/2006/main" xmlns:r="http://schemas.openxmlformats.org/officeDocument/2006/relationships" xmlns:p="http://schemas.openxmlformats.org/presentationml/2006/main">
+  <p:cSld name="Slide 15">
+    <p:bg>
+      <p:bgPr>
+        <a:solidFill>
+          <a:srgbClr val="F5F9F9"/>
+        </a:solidFill>
+      </p:bgPr>
+    </p:bg>
+    <p:spTree>
+      <p:nvGrpSpPr>
+        <p:cNvPr id="1" name=""/>
+        <p:cNvGrpSpPr/>
+        <p:nvPr/>
+      </p:nvGrpSpPr>
+      <p:grpSpPr>
+        <a:xfrm>
+          <a:off x="0" y="0"/>
+          <a:ext cx="0" cy="0"/>
+          <a:chOff x="0" y="0"/>
+          <a:chExt cx="0" cy="0"/>
+        </a:xfrm>
+      </p:grpSpPr>
+      <p:sp>
+        <p:nvSpPr>
+          <p:cNvPr id="2" name="Text 0"/>
+          <p:cNvSpPr txBox="1"/>
+          <p:nvPr/>
+        </p:nvSpPr>
+        <p:spPr>
+          <a:xfrm>
+            <a:off x="548640" y="320040"/>
+            <a:ext cx="8229600" cy="320040"/>
+          </a:xfrm>
+          <a:prstGeom prst="rect">
+            <a:avLst/>
+          </a:prstGeom>
+          <a:noFill/>
+          <a:ln/>
+        </p:spPr>
+        <p:txBody>
+          <a:bodyPr wrap="square" lIns="0" tIns="0" rIns="0" bIns="0" rtlCol="0" anchor="ctr"/>
+          <a:lstStyle/>
+          <a:p>
+            <a:pPr indent="0" marL="0">
+              <a:buNone/>
+            </a:pPr>
+            <a:r>
+              <a:rPr lang="en-US" sz="1300" b="1" spc="200" kern="0" dirty="0">
+                <a:solidFill>
+                  <a:srgbClr val="00A896"/>
+                </a:solidFill>
+                <a:latin typeface="Calibri" pitchFamily="34" charset="0"/>
+                <a:ea typeface="Calibri" pitchFamily="34" charset="-122"/>
+                <a:cs typeface="Calibri" pitchFamily="34" charset="-120"/>
+              </a:rPr>
+              <a:t>SOURCES</a:t>
+            </a:r>
+            <a:endParaRPr lang="en-US" sz="1300" dirty="0"/>
+          </a:p>
+        </p:txBody>
+      </p:sp>
+      <p:sp>
+        <p:nvSpPr>
+          <p:cNvPr id="3" name="Text 1"/>
+          <p:cNvSpPr txBox="1"/>
+          <p:nvPr/>
+        </p:nvSpPr>
+        <p:spPr>
+          <a:xfrm>
+            <a:off x="548640" y="621792"/>
+            <a:ext cx="10789920" cy="822960"/>
+          </a:xfrm>
+          <a:prstGeom prst="rect">
+            <a:avLst/>
+          </a:prstGeom>
+          <a:noFill/>
+          <a:ln/>
+        </p:spPr>
+        <p:txBody>
+          <a:bodyPr wrap="square" lIns="0" tIns="0" rIns="0" bIns="0" rtlCol="0" anchor="ctr"/>
+          <a:lstStyle/>
+          <a:p>
+            <a:pPr indent="0" marL="0">
+              <a:buNone/>
+            </a:pPr>
+            <a:r>
+              <a:rPr lang="en-US" sz="2800" b="1" dirty="0">
+                <a:solidFill>
+                  <a:srgbClr val="0B2027"/>
+                </a:solidFill>
+                <a:latin typeface="Cambria" pitchFamily="34" charset="0"/>
+                <a:ea typeface="Cambria" pitchFamily="34" charset="-122"/>
+                <a:cs typeface="Cambria" pitchFamily="34" charset="-120"/>
+              </a:rPr>
+              <a:t>References</a:t>
+            </a:r>
+            <a:endParaRPr lang="en-US" sz="2800" dirty="0"/>
+          </a:p>
+        </p:txBody>
+      </p:sp>
+      <p:sp>
+        <p:nvSpPr>
+          <p:cNvPr id="4" name="Text 2"/>
+          <p:cNvSpPr txBox="1"/>
+          <p:nvPr/>
+        </p:nvSpPr>
+        <p:spPr>
+          <a:xfrm>
+            <a:off x="548640" y="1737360"/>
+            <a:ext cx="11064240" cy="822960"/>
+          </a:xfrm>
+          <a:prstGeom prst="rect">
+            <a:avLst/>
+          </a:prstGeom>
+          <a:noFill/>
+          <a:ln/>
+        </p:spPr>
+        <p:txBody>
+          <a:bodyPr wrap="square" lIns="0" tIns="0" rIns="0" bIns="0" rtlCol="0" anchor="t"/>
+          <a:lstStyle/>
+          <a:p>
+            <a:pPr indent="0" marL="0">
+              <a:buNone/>
+            </a:pPr>
+            <a:r>
+              <a:rPr lang="en-US" sz="1300" dirty="0">
+                <a:solidFill>
+                  <a:srgbClr val="0B2027"/>
+                </a:solidFill>
+                <a:latin typeface="Calibri" pitchFamily="34" charset="0"/>
+                <a:ea typeface="Calibri" pitchFamily="34" charset="-122"/>
+                <a:cs typeface="Calibri" pitchFamily="34" charset="-120"/>
+              </a:rPr>
+              <a:t>Centers for Medicare &amp; Medicaid Services. (2023). Hospital Readmissions Reduction Program (HRRP). U.S. Department of Health and Human Services. https://www.cms.gov/medicare/payment/prospective-payment-systems/acute-inpatient-pps/hospital-readmissions-reduction-program-hrrp</a:t>
+            </a:r>
+            <a:endParaRPr lang="en-US" sz="1300" dirty="0"/>
+          </a:p>
+        </p:txBody>
+      </p:sp>
+      <p:sp>
+        <p:nvSpPr>
+          <p:cNvPr id="5" name="Text 3"/>
+          <p:cNvSpPr txBox="1"/>
+          <p:nvPr/>
+        </p:nvSpPr>
+        <p:spPr>
+          <a:xfrm>
+            <a:off x="548640" y="2651760"/>
+            <a:ext cx="11064240" cy="822960"/>
+          </a:xfrm>
+          <a:prstGeom prst="rect">
+            <a:avLst/>
+          </a:prstGeom>
+          <a:noFill/>
+          <a:ln/>
+        </p:spPr>
+        <p:txBody>
+          <a:bodyPr wrap="square" lIns="0" tIns="0" rIns="0" bIns="0" rtlCol="0" anchor="t"/>
+          <a:lstStyle/>
+          <a:p>
+            <a:pPr indent="0" marL="0">
+              <a:buNone/>
+            </a:pPr>
+            <a:r>
+              <a:rPr lang="en-US" sz="1300" dirty="0">
+                <a:solidFill>
+                  <a:srgbClr val="0B2027"/>
+                </a:solidFill>
+                <a:latin typeface="Calibri" pitchFamily="34" charset="0"/>
+                <a:ea typeface="Calibri" pitchFamily="34" charset="-122"/>
+                <a:cs typeface="Calibri" pitchFamily="34" charset="-120"/>
+              </a:rPr>
+              <a:t>Strack, B., DeShazo, J. P., Gennings, C., Olmo, J. L., Ventura, S., Cios, K. J., &amp; Clore, J. N. (2014). Impact of HbA1c measurement on hospital readmission rates: Analysis of 70,000 clinical database patient records. BioMed Research International, 2014, Article 781670. https://doi.org/10.1155/2014/781670</a:t>
+            </a:r>
+            <a:endParaRPr lang="en-US" sz="1300" dirty="0"/>
+          </a:p>
+        </p:txBody>
+      </p:sp>
+      <p:sp>
+        <p:nvSpPr>
+          <p:cNvPr id="6" name="Text 4"/>
+          <p:cNvSpPr txBox="1"/>
+          <p:nvPr/>
+        </p:nvSpPr>
+        <p:spPr>
+          <a:xfrm>
+            <a:off x="548640" y="3840480"/>
+            <a:ext cx="11064240" cy="548640"/>
+          </a:xfrm>
+          <a:prstGeom prst="rect">
+            <a:avLst/>
+          </a:prstGeom>
+          <a:noFill/>
+          <a:ln/>
+        </p:spPr>
+        <p:txBody>
+          <a:bodyPr wrap="square" lIns="0" tIns="0" rIns="0" bIns="0" rtlCol="0" anchor="ctr"/>
+          <a:lstStyle/>
+          <a:p>
+            <a:pPr indent="0" marL="0">
+              <a:buNone/>
+            </a:pPr>
+            <a:r>
+              <a:rPr lang="en-US" sz="1200" i="1" dirty="0">
+                <a:solidFill>
+                  <a:srgbClr val="5B7379"/>
+                </a:solidFill>
+                <a:latin typeface="Calibri" pitchFamily="34" charset="0"/>
+                <a:ea typeface="Calibri" pitchFamily="34" charset="-122"/>
+                <a:cs typeface="Calibri" pitchFamily="34" charset="-120"/>
+              </a:rPr>
+              <a:t>Additional data and methodology detail: Module 1–4 project documentation (Vision Document, Project Overview Report, Data Pipeline artifacts, Model Validation Report).</a:t>
+            </a:r>
+            <a:endParaRPr lang="en-US" sz="1200" dirty="0"/>
+          </a:p>
+        </p:txBody>
+      </p:sp>
+      <p:sp>
+        <p:nvSpPr>
+          <p:cNvPr id="7" name="Text 5"/>
+          <p:cNvSpPr txBox="1"/>
+          <p:nvPr/>
+        </p:nvSpPr>
+        <p:spPr>
+          <a:xfrm>
+            <a:off x="11521440" y="6446520"/>
+            <a:ext cx="548640" cy="320040"/>
+          </a:xfrm>
+          <a:prstGeom prst="rect">
+            <a:avLst/>
+          </a:prstGeom>
+          <a:noFill/>
+          <a:ln/>
+        </p:spPr>
+        <p:txBody>
+          <a:bodyPr wrap="square" lIns="0" tIns="0" rIns="0" bIns="0" rtlCol="0" anchor="ctr"/>
+          <a:lstStyle/>
+          <a:p>
+            <a:pPr algn="r" indent="0" marL="0">
+              <a:buNone/>
+            </a:pPr>
+            <a:r>
+              <a:rPr lang="en-US" sz="1000" dirty="0">
+                <a:solidFill>
+                  <a:srgbClr val="5B7379"/>
+                </a:solidFill>
+                <a:latin typeface="Calibri" pitchFamily="34" charset="0"/>
+                <a:ea typeface="Calibri" pitchFamily="34" charset="-122"/>
+                <a:cs typeface="Calibri" pitchFamily="34" charset="-120"/>
+              </a:rPr>
+              <a:t>15</a:t>
+            </a:r>
+            <a:endParaRPr lang="en-US" sz="1000" dirty="0"/>
+          </a:p>
+        </p:txBody>
+      </p:sp>
+    </p:spTree>
+  </p:cSld>
+  <p:clrMapOvr>
+    <a:masterClrMapping/>
+  </p:clrMapOvr>
+</p:sld>
+</file>
+
 <file path=ppt/slides/slide2.xml><?xml version="1.0" encoding="utf-8"?>
 <p:sld xmlns:a="http://schemas.openxmlformats.org/drawingml/2006/main" xmlns:r="http://schemas.openxmlformats.org/officeDocument/2006/relationships" xmlns:p="http://schemas.openxmlformats.org/presentationml/2006/main">
   <p:cSld name="Slide 2">
